--- a/output/presentation/T07-final-submission-v2.pptx
+++ b/output/presentation/T07-final-submission-v2.pptx
@@ -19,6 +19,7 @@
     <p:sldId xmlns:r="http://schemas.openxmlformats.org/officeDocument/2006/relationships" id="263" r:id="Ra06e7edaf0634b62"/>
     <p:sldId xmlns:r="http://schemas.openxmlformats.org/officeDocument/2006/relationships" id="267" r:id="rId2"/>
     <p:sldId xmlns:r="http://schemas.openxmlformats.org/officeDocument/2006/relationships" id="264" r:id="R30bc046fee6d46b6"/>
+    <p:sldId xmlns:r="http://schemas.openxmlformats.org/officeDocument/2006/relationships" id="268" r:id="rId3"/>
     <p:sldId xmlns:r="http://schemas.openxmlformats.org/officeDocument/2006/relationships" id="265" r:id="R7f365e12cb5c40e0"/>
   </p:sldIdLst>
   <p:sldSz cx="12192000" cy="6858000"/>
@@ -4514,7 +4515,7 @@
                 <a:ea typeface="Arial"/>
                 <a:cs typeface="Arial"/>
               </a:rPr>
-              <a:t>25b3b261819f269da54e3d20d847f314573c783c</a:t>
+              <a:t>acfaa67a69360644b658d2ec811d716d58fd7528</a:t>
             </a:r>
           </a:p>
         </p:txBody>
@@ -4587,6 +4588,1219 @@
 </file>
 
 <file path=ppt/slides/slide12.xml><?xml version="1.0" encoding="utf-8"?>
+<p:sld xmlns:p="http://schemas.openxmlformats.org/presentationml/2006/main">
+  <p:cSld>
+    <p:bg>
+      <p:bgPr>
+        <a:solidFill xmlns:a="http://schemas.openxmlformats.org/drawingml/2006/main">
+          <a:srgbClr val="F8FAFC"/>
+        </a:solidFill>
+      </p:bgPr>
+    </p:bg>
+    <p:spTree>
+      <p:nvGrpSpPr>
+        <p:cNvPr id="1" name=""/>
+        <p:cNvGrpSpPr/>
+        <p:nvPr/>
+      </p:nvGrpSpPr>
+      <p:grpSpPr>
+        <a:xfrm xmlns:a="http://schemas.openxmlformats.org/drawingml/2006/main"/>
+      </p:grpSpPr>
+      <p:sp>
+        <p:nvSpPr>
+          <p:cNvPr id="27" name="">
+            <a:extLst xmlns:a="http://schemas.openxmlformats.org/drawingml/2006/main">
+              <a:ext uri="{FF2B5EF4-FFF2-40B4-BE49-F238E27FC236}">
+                <a16:creationId xmlns:a16="http://schemas.microsoft.com/office/drawing/2014/main" id="{AB20E29E-3894-4737-A62B-721B86D6F320}"/>
+              </a:ext>
+            </a:extLst>
+          </p:cNvPr>
+          <p:cNvSpPr>
+            <a:spLocks xmlns:a="http://schemas.openxmlformats.org/drawingml/2006/main" noGrp="1"/>
+          </p:cNvSpPr>
+          <p:nvPr/>
+        </p:nvSpPr>
+        <p:spPr>
+          <a:xfrm xmlns:a="http://schemas.openxmlformats.org/drawingml/2006/main">
+            <a:off x="609600" y="323850"/>
+            <a:ext cx="7620000" cy="228600"/>
+          </a:xfrm>
+          <a:prstGeom xmlns:a="http://schemas.openxmlformats.org/drawingml/2006/main" prst="rect">
+            <a:avLst/>
+          </a:prstGeom>
+          <a:noFill xmlns:a="http://schemas.openxmlformats.org/drawingml/2006/main"/>
+          <a:ln xmlns:a="http://schemas.openxmlformats.org/drawingml/2006/main" w="0">
+            <a:noFill/>
+          </a:ln>
+        </p:spPr>
+        <p:txBody>
+          <a:bodyPr xmlns:a="http://schemas.openxmlformats.org/drawingml/2006/main">
+            <a:normAutofit fontScale="92308"/>
+          </a:bodyPr>
+          <a:lstStyle xmlns:a="http://schemas.openxmlformats.org/drawingml/2006/main"/>
+          <a:p xmlns:a="http://schemas.openxmlformats.org/drawingml/2006/main">
+            <a:pPr>
+              <a:defRPr sz="975" b="1">
+                <a:solidFill>
+                  <a:srgbClr val="2563EB"/>
+                </a:solidFill>
+                <a:latin typeface="Arial"/>
+                <a:ea typeface="Arial"/>
+                <a:cs typeface="Arial"/>
+              </a:defRPr>
+            </a:pPr>
+            <a:r>
+              <a:rPr sz="975" b="1">
+                <a:solidFill>
+                  <a:srgbClr val="2563EB"/>
+                </a:solidFill>
+                <a:latin typeface="Arial"/>
+                <a:ea typeface="Arial"/>
+                <a:cs typeface="Arial"/>
+              </a:rPr>
+              <a:t>09 · SUBMISSION CHECK</a:t>
+            </a:r>
+          </a:p>
+        </p:txBody>
+      </p:sp>
+      <p:sp>
+        <p:nvSpPr>
+          <p:cNvPr id="2" name="">
+            <a:extLst xmlns:a="http://schemas.openxmlformats.org/drawingml/2006/main">
+              <a:ext uri="{FF2B5EF4-FFF2-40B4-BE49-F238E27FC236}">
+                <a16:creationId xmlns:a16="http://schemas.microsoft.com/office/drawing/2014/main" id="{CD5EA59E-8712-4844-AA3B-DA85D1B9BD33}"/>
+              </a:ext>
+            </a:extLst>
+          </p:cNvPr>
+          <p:cNvSpPr>
+            <a:spLocks xmlns:a="http://schemas.openxmlformats.org/drawingml/2006/main" noGrp="1"/>
+          </p:cNvSpPr>
+          <p:nvPr/>
+        </p:nvSpPr>
+        <p:spPr>
+          <a:xfrm xmlns:a="http://schemas.openxmlformats.org/drawingml/2006/main">
+            <a:off x="609600" y="647700"/>
+            <a:ext cx="10382250" cy="523875"/>
+          </a:xfrm>
+          <a:prstGeom xmlns:a="http://schemas.openxmlformats.org/drawingml/2006/main" prst="rect">
+            <a:avLst/>
+          </a:prstGeom>
+          <a:noFill xmlns:a="http://schemas.openxmlformats.org/drawingml/2006/main"/>
+          <a:ln xmlns:a="http://schemas.openxmlformats.org/drawingml/2006/main" w="0">
+            <a:noFill/>
+          </a:ln>
+        </p:spPr>
+        <p:txBody>
+          <a:bodyPr xmlns:a="http://schemas.openxmlformats.org/drawingml/2006/main">
+            <a:normAutofit fontScale="100000"/>
+          </a:bodyPr>
+          <a:lstStyle xmlns:a="http://schemas.openxmlformats.org/drawingml/2006/main"/>
+          <a:p xmlns:a="http://schemas.openxmlformats.org/drawingml/2006/main">
+            <a:pPr>
+              <a:defRPr sz="2550" b="1">
+                <a:solidFill>
+                  <a:srgbClr val="172033"/>
+                </a:solidFill>
+                <a:latin typeface="Arial"/>
+                <a:ea typeface="Arial"/>
+                <a:cs typeface="Arial"/>
+              </a:defRPr>
+            </a:pPr>
+            <a:r>
+              <a:rPr sz="2550" b="1">
+                <a:solidFill>
+                  <a:srgbClr val="172033"/>
+                </a:solidFill>
+                <a:latin typeface="Arial"/>
+                <a:ea typeface="Arial"/>
+                <a:cs typeface="Arial"/>
+              </a:rPr>
+              <a:t>확인한 것과, 아직 남은 것</a:t>
+            </a:r>
+          </a:p>
+        </p:txBody>
+      </p:sp>
+      <p:sp>
+        <p:nvSpPr>
+          <p:cNvPr id="3" name="">
+            <a:extLst xmlns:a="http://schemas.openxmlformats.org/drawingml/2006/main">
+              <a:ext uri="{FF2B5EF4-FFF2-40B4-BE49-F238E27FC236}">
+                <a16:creationId xmlns:a16="http://schemas.microsoft.com/office/drawing/2014/main" id="{1F2A69D7-F742-43BE-BBBB-1195B8700BB0}"/>
+              </a:ext>
+            </a:extLst>
+          </p:cNvPr>
+          <p:cNvSpPr>
+            <a:spLocks xmlns:a="http://schemas.openxmlformats.org/drawingml/2006/main" noGrp="1"/>
+          </p:cNvSpPr>
+          <p:nvPr/>
+        </p:nvSpPr>
+        <p:spPr>
+          <a:xfrm xmlns:a="http://schemas.openxmlformats.org/drawingml/2006/main">
+            <a:off x="609600" y="1257300"/>
+            <a:ext cx="10972800" cy="0"/>
+          </a:xfrm>
+          <a:prstGeom xmlns:a="http://schemas.openxmlformats.org/drawingml/2006/main" prst="line">
+            <a:avLst/>
+          </a:prstGeom>
+          <a:noFill xmlns:a="http://schemas.openxmlformats.org/drawingml/2006/main"/>
+          <a:ln xmlns:a="http://schemas.openxmlformats.org/drawingml/2006/main" w="9525">
+            <a:solidFill>
+              <a:srgbClr val="D8E1EE"/>
+            </a:solidFill>
+            <a:prstDash val="solid"/>
+          </a:ln>
+        </p:spPr>
+        <p:txBody xmlns:a="http://schemas.openxmlformats.org/drawingml/2006/main">
+          <a:bodyPr/>
+          <a:p/>
+        </p:txBody>
+      </p:sp>
+      <p:sp>
+        <p:nvSpPr>
+          <p:cNvPr id="4" name="">
+            <a:extLst xmlns:a="http://schemas.openxmlformats.org/drawingml/2006/main">
+              <a:ext uri="{FF2B5EF4-FFF2-40B4-BE49-F238E27FC236}">
+                <a16:creationId xmlns:a16="http://schemas.microsoft.com/office/drawing/2014/main" id="{5CE512FC-A1F3-428E-BBC3-D2A4946BD913}"/>
+              </a:ext>
+            </a:extLst>
+          </p:cNvPr>
+          <p:cNvSpPr>
+            <a:spLocks xmlns:a="http://schemas.openxmlformats.org/drawingml/2006/main" noGrp="1"/>
+          </p:cNvSpPr>
+          <p:nvPr/>
+        </p:nvSpPr>
+        <p:spPr>
+          <a:xfrm xmlns:a="http://schemas.openxmlformats.org/drawingml/2006/main">
+            <a:off x="609600" y="6515100"/>
+            <a:ext cx="3333750" cy="152400"/>
+          </a:xfrm>
+          <a:prstGeom xmlns:a="http://schemas.openxmlformats.org/drawingml/2006/main" prst="rect">
+            <a:avLst/>
+          </a:prstGeom>
+          <a:noFill xmlns:a="http://schemas.openxmlformats.org/drawingml/2006/main"/>
+          <a:ln xmlns:a="http://schemas.openxmlformats.org/drawingml/2006/main" w="0">
+            <a:noFill/>
+          </a:ln>
+        </p:spPr>
+        <p:txBody>
+          <a:bodyPr xmlns:a="http://schemas.openxmlformats.org/drawingml/2006/main">
+            <a:normAutofit fontScale="53333"/>
+          </a:bodyPr>
+          <a:lstStyle xmlns:a="http://schemas.openxmlformats.org/drawingml/2006/main"/>
+          <a:p xmlns:a="http://schemas.openxmlformats.org/drawingml/2006/main">
+            <a:pPr>
+              <a:defRPr sz="750" b="1">
+                <a:solidFill>
+                  <a:srgbClr val="667085"/>
+                </a:solidFill>
+                <a:latin typeface="Arial"/>
+                <a:ea typeface="Arial"/>
+                <a:cs typeface="Arial"/>
+              </a:defRPr>
+            </a:pPr>
+            <a:r>
+              <a:rPr sz="750" b="1">
+                <a:solidFill>
+                  <a:srgbClr val="667085"/>
+                </a:solidFill>
+                <a:latin typeface="Arial"/>
+                <a:ea typeface="Arial"/>
+                <a:cs typeface="Arial"/>
+              </a:rPr>
+              <a:t>T07 · PLAN DO SEE DIARY</a:t>
+            </a:r>
+          </a:p>
+        </p:txBody>
+      </p:sp>
+      <p:sp>
+        <p:nvSpPr>
+          <p:cNvPr id="5" name="">
+            <a:extLst xmlns:a="http://schemas.openxmlformats.org/drawingml/2006/main">
+              <a:ext uri="{FF2B5EF4-FFF2-40B4-BE49-F238E27FC236}">
+                <a16:creationId xmlns:a16="http://schemas.microsoft.com/office/drawing/2014/main" id="{AD1362EA-19BE-4DA9-AB2D-F988BE7DF038}"/>
+              </a:ext>
+            </a:extLst>
+          </p:cNvPr>
+          <p:cNvSpPr>
+            <a:spLocks xmlns:a="http://schemas.openxmlformats.org/drawingml/2006/main" noGrp="1"/>
+          </p:cNvSpPr>
+          <p:nvPr/>
+        </p:nvSpPr>
+        <p:spPr>
+          <a:xfrm xmlns:a="http://schemas.openxmlformats.org/drawingml/2006/main">
+            <a:off x="11144250" y="6477000"/>
+            <a:ext cx="438150" cy="190500"/>
+          </a:xfrm>
+          <a:prstGeom xmlns:a="http://schemas.openxmlformats.org/drawingml/2006/main" prst="rect">
+            <a:avLst/>
+          </a:prstGeom>
+          <a:noFill xmlns:a="http://schemas.openxmlformats.org/drawingml/2006/main"/>
+          <a:ln xmlns:a="http://schemas.openxmlformats.org/drawingml/2006/main" w="0">
+            <a:noFill/>
+          </a:ln>
+        </p:spPr>
+        <p:txBody>
+          <a:bodyPr xmlns:a="http://schemas.openxmlformats.org/drawingml/2006/main">
+            <a:normAutofit fontScale="78788"/>
+          </a:bodyPr>
+          <a:lstStyle xmlns:a="http://schemas.openxmlformats.org/drawingml/2006/main"/>
+          <a:p xmlns:a="http://schemas.openxmlformats.org/drawingml/2006/main">
+            <a:pPr>
+              <a:defRPr sz="825" b="1">
+                <a:solidFill>
+                  <a:srgbClr val="667085"/>
+                </a:solidFill>
+                <a:latin typeface="Arial"/>
+                <a:ea typeface="Arial"/>
+                <a:cs typeface="Arial"/>
+              </a:defRPr>
+            </a:pPr>
+            <a:r>
+              <a:rPr sz="825" b="1">
+                <a:solidFill>
+                  <a:srgbClr val="667085"/>
+                </a:solidFill>
+                <a:latin typeface="Arial"/>
+                <a:ea typeface="Arial"/>
+                <a:cs typeface="Arial"/>
+              </a:rPr>
+              <a:t>12</a:t>
+            </a:r>
+          </a:p>
+        </p:txBody>
+      </p:sp>
+      <p:sp xmlns:a="http://schemas.openxmlformats.org/drawingml/2006/main">
+        <p:nvSpPr>
+          <p:cNvPr id="28" name="TextBox 27"/>
+          <p:cNvSpPr txBox="1"/>
+          <p:nvPr/>
+        </p:nvSpPr>
+        <p:spPr>
+          <a:xfrm>
+            <a:off x="731520" y="1627632"/>
+            <a:ext cx="292608" cy="310896"/>
+          </a:xfrm>
+          <a:prstGeom prst="rect">
+            <a:avLst/>
+          </a:prstGeom>
+          <a:noFill/>
+        </p:spPr>
+        <p:txBody>
+          <a:bodyPr wrap="square" lIns="0" rIns="0" tIns="0" bIns="0">
+            <a:spAutoFit/>
+          </a:bodyPr>
+          <a:lstStyle/>
+          <a:p>
+            <a:pPr algn="l"/>
+            <a:r>
+              <a:rPr sz="1500" b="1">
+                <a:solidFill>
+                  <a:srgbClr val="15803D"/>
+                </a:solidFill>
+                <a:latin typeface="Arial"/>
+              </a:rPr>
+              <a:t>✓</a:t>
+            </a:r>
+          </a:p>
+        </p:txBody>
+      </p:sp>
+      <p:sp xmlns:a="http://schemas.openxmlformats.org/drawingml/2006/main">
+        <p:nvSpPr>
+          <p:cNvPr id="29" name="TextBox 28"/>
+          <p:cNvSpPr txBox="1"/>
+          <p:nvPr/>
+        </p:nvSpPr>
+        <p:spPr>
+          <a:xfrm>
+            <a:off x="1133856" y="1627632"/>
+            <a:ext cx="3931920" cy="310896"/>
+          </a:xfrm>
+          <a:prstGeom prst="rect">
+            <a:avLst/>
+          </a:prstGeom>
+          <a:noFill/>
+        </p:spPr>
+        <p:txBody>
+          <a:bodyPr wrap="square" lIns="0" rIns="0" tIns="0" bIns="0">
+            <a:spAutoFit/>
+          </a:bodyPr>
+          <a:lstStyle/>
+          <a:p>
+            <a:pPr algn="l"/>
+            <a:r>
+              <a:rPr sz="1350" b="1">
+                <a:solidFill>
+                  <a:srgbClr val="172033"/>
+                </a:solidFill>
+                <a:latin typeface="Arial"/>
+              </a:rPr>
+              <a:t>서로 다른 실제 날짜 5일</a:t>
+            </a:r>
+          </a:p>
+        </p:txBody>
+      </p:sp>
+      <p:sp xmlns:a="http://schemas.openxmlformats.org/drawingml/2006/main">
+        <p:nvSpPr>
+          <p:cNvPr id="30" name="TextBox 29"/>
+          <p:cNvSpPr txBox="1"/>
+          <p:nvPr/>
+        </p:nvSpPr>
+        <p:spPr>
+          <a:xfrm>
+            <a:off x="5212080" y="1645920"/>
+            <a:ext cx="6035040" cy="310896"/>
+          </a:xfrm>
+          <a:prstGeom prst="rect">
+            <a:avLst/>
+          </a:prstGeom>
+          <a:noFill/>
+        </p:spPr>
+        <p:txBody>
+          <a:bodyPr wrap="square" lIns="0" rIns="0" tIns="0" bIns="0">
+            <a:spAutoFit/>
+          </a:bodyPr>
+          <a:lstStyle/>
+          <a:p>
+            <a:pPr algn="l"/>
+            <a:r>
+              <a:rPr sz="1150" b="0">
+                <a:solidFill>
+                  <a:srgbClr val="667085"/>
+                </a:solidFill>
+                <a:latin typeface="Arial"/>
+              </a:rPr>
+              <a:t>2026-09-07 — 09-11 · 각 날짜 실행 기록 1건</a:t>
+            </a:r>
+          </a:p>
+        </p:txBody>
+      </p:sp>
+      <p:sp xmlns:a="http://schemas.openxmlformats.org/drawingml/2006/main">
+        <p:nvSpPr>
+          <p:cNvPr id="31" name="TextBox 30"/>
+          <p:cNvSpPr txBox="1"/>
+          <p:nvPr/>
+        </p:nvSpPr>
+        <p:spPr>
+          <a:xfrm>
+            <a:off x="731520" y="2130552"/>
+            <a:ext cx="292608" cy="310896"/>
+          </a:xfrm>
+          <a:prstGeom prst="rect">
+            <a:avLst/>
+          </a:prstGeom>
+          <a:noFill/>
+        </p:spPr>
+        <p:txBody>
+          <a:bodyPr wrap="square" lIns="0" rIns="0" tIns="0" bIns="0">
+            <a:spAutoFit/>
+          </a:bodyPr>
+          <a:lstStyle/>
+          <a:p>
+            <a:pPr algn="l"/>
+            <a:r>
+              <a:rPr sz="1500" b="1">
+                <a:solidFill>
+                  <a:srgbClr val="15803D"/>
+                </a:solidFill>
+                <a:latin typeface="Arial"/>
+              </a:rPr>
+              <a:t>✓</a:t>
+            </a:r>
+          </a:p>
+        </p:txBody>
+      </p:sp>
+      <p:sp xmlns:a="http://schemas.openxmlformats.org/drawingml/2006/main">
+        <p:nvSpPr>
+          <p:cNvPr id="32" name="TextBox 31"/>
+          <p:cNvSpPr txBox="1"/>
+          <p:nvPr/>
+        </p:nvSpPr>
+        <p:spPr>
+          <a:xfrm>
+            <a:off x="1133856" y="2130552"/>
+            <a:ext cx="3931920" cy="310896"/>
+          </a:xfrm>
+          <a:prstGeom prst="rect">
+            <a:avLst/>
+          </a:prstGeom>
+          <a:noFill/>
+        </p:spPr>
+        <p:txBody>
+          <a:bodyPr wrap="square" lIns="0" rIns="0" tIns="0" bIns="0">
+            <a:spAutoFit/>
+          </a:bodyPr>
+          <a:lstStyle/>
+          <a:p>
+            <a:pPr algn="l"/>
+            <a:r>
+              <a:rPr sz="1350" b="1">
+                <a:solidFill>
+                  <a:srgbClr val="172033"/>
+                </a:solidFill>
+                <a:latin typeface="Arial"/>
+              </a:rPr>
+              <a:t>규칙 변경 1회와 전후 비교</a:t>
+            </a:r>
+          </a:p>
+        </p:txBody>
+      </p:sp>
+      <p:sp xmlns:a="http://schemas.openxmlformats.org/drawingml/2006/main">
+        <p:nvSpPr>
+          <p:cNvPr id="33" name="TextBox 32"/>
+          <p:cNvSpPr txBox="1"/>
+          <p:nvPr/>
+        </p:nvSpPr>
+        <p:spPr>
+          <a:xfrm>
+            <a:off x="5212080" y="2148840"/>
+            <a:ext cx="6035040" cy="310896"/>
+          </a:xfrm>
+          <a:prstGeom prst="rect">
+            <a:avLst/>
+          </a:prstGeom>
+          <a:noFill/>
+        </p:spPr>
+        <p:txBody>
+          <a:bodyPr wrap="square" lIns="0" rIns="0" tIns="0" bIns="0">
+            <a:spAutoFit/>
+          </a:bodyPr>
+          <a:lstStyle/>
+          <a:p>
+            <a:pPr algn="l"/>
+            <a:r>
+              <a:rPr sz="1150" b="0">
+                <a:solidFill>
+                  <a:srgbClr val="667085"/>
+                </a:solidFill>
+                <a:latin typeface="Arial"/>
+              </a:rPr>
+              <a:t>09-08 02:27 KST · 0.63배 → 0.40배 · 전체 0.56배</a:t>
+            </a:r>
+          </a:p>
+        </p:txBody>
+      </p:sp>
+      <p:sp xmlns:a="http://schemas.openxmlformats.org/drawingml/2006/main">
+        <p:nvSpPr>
+          <p:cNvPr id="34" name="TextBox 33"/>
+          <p:cNvSpPr txBox="1"/>
+          <p:nvPr/>
+        </p:nvSpPr>
+        <p:spPr>
+          <a:xfrm>
+            <a:off x="731520" y="2633472"/>
+            <a:ext cx="292608" cy="310896"/>
+          </a:xfrm>
+          <a:prstGeom prst="rect">
+            <a:avLst/>
+          </a:prstGeom>
+          <a:noFill/>
+        </p:spPr>
+        <p:txBody>
+          <a:bodyPr wrap="square" lIns="0" rIns="0" tIns="0" bIns="0">
+            <a:spAutoFit/>
+          </a:bodyPr>
+          <a:lstStyle/>
+          <a:p>
+            <a:pPr algn="l"/>
+            <a:r>
+              <a:rPr sz="1500" b="1">
+                <a:solidFill>
+                  <a:srgbClr val="15803D"/>
+                </a:solidFill>
+                <a:latin typeface="Arial"/>
+              </a:rPr>
+              <a:t>✓</a:t>
+            </a:r>
+          </a:p>
+        </p:txBody>
+      </p:sp>
+      <p:sp xmlns:a="http://schemas.openxmlformats.org/drawingml/2006/main">
+        <p:nvSpPr>
+          <p:cNvPr id="35" name="TextBox 34"/>
+          <p:cNvSpPr txBox="1"/>
+          <p:nvPr/>
+        </p:nvSpPr>
+        <p:spPr>
+          <a:xfrm>
+            <a:off x="1133856" y="2633472"/>
+            <a:ext cx="3931920" cy="310896"/>
+          </a:xfrm>
+          <a:prstGeom prst="rect">
+            <a:avLst/>
+          </a:prstGeom>
+          <a:noFill/>
+        </p:spPr>
+        <p:txBody>
+          <a:bodyPr wrap="square" lIns="0" rIns="0" tIns="0" bIns="0">
+            <a:spAutoFit/>
+          </a:bodyPr>
+          <a:lstStyle/>
+          <a:p>
+            <a:pPr algn="l"/>
+            <a:r>
+              <a:rPr sz="1350" b="1">
+                <a:solidFill>
+                  <a:srgbClr val="172033"/>
+                </a:solidFill>
+                <a:latin typeface="Arial"/>
+              </a:rPr>
+              <a:t>화면 합계와 손계산 일치</a:t>
+            </a:r>
+          </a:p>
+        </p:txBody>
+      </p:sp>
+      <p:sp xmlns:a="http://schemas.openxmlformats.org/drawingml/2006/main">
+        <p:nvSpPr>
+          <p:cNvPr id="36" name="TextBox 35"/>
+          <p:cNvSpPr txBox="1"/>
+          <p:nvPr/>
+        </p:nvSpPr>
+        <p:spPr>
+          <a:xfrm>
+            <a:off x="5212080" y="2651760"/>
+            <a:ext cx="6035040" cy="310896"/>
+          </a:xfrm>
+          <a:prstGeom prst="rect">
+            <a:avLst/>
+          </a:prstGeom>
+          <a:noFill/>
+        </p:spPr>
+        <p:txBody>
+          <a:bodyPr wrap="square" lIns="0" rIns="0" tIns="0" bIns="0">
+            <a:spAutoFit/>
+          </a:bodyPr>
+          <a:lstStyle/>
+          <a:p>
+            <a:pPr algn="l"/>
+            <a:r>
+              <a:rPr sz="1150" b="0">
+                <a:solidFill>
+                  <a:srgbClr val="667085"/>
+                </a:solidFill>
+                <a:latin typeface="Arial"/>
+              </a:rPr>
+              <a:t>38÷60 · 12÷30 · 50÷90 을 배포 화면과 대조</a:t>
+            </a:r>
+          </a:p>
+        </p:txBody>
+      </p:sp>
+      <p:sp xmlns:a="http://schemas.openxmlformats.org/drawingml/2006/main">
+        <p:nvSpPr>
+          <p:cNvPr id="37" name="TextBox 36"/>
+          <p:cNvSpPr txBox="1"/>
+          <p:nvPr/>
+        </p:nvSpPr>
+        <p:spPr>
+          <a:xfrm>
+            <a:off x="731520" y="3136392"/>
+            <a:ext cx="292608" cy="310896"/>
+          </a:xfrm>
+          <a:prstGeom prst="rect">
+            <a:avLst/>
+          </a:prstGeom>
+          <a:noFill/>
+        </p:spPr>
+        <p:txBody>
+          <a:bodyPr wrap="square" lIns="0" rIns="0" tIns="0" bIns="0">
+            <a:spAutoFit/>
+          </a:bodyPr>
+          <a:lstStyle/>
+          <a:p>
+            <a:pPr algn="l"/>
+            <a:r>
+              <a:rPr sz="1500" b="1">
+                <a:solidFill>
+                  <a:srgbClr val="15803D"/>
+                </a:solidFill>
+                <a:latin typeface="Arial"/>
+              </a:rPr>
+              <a:t>✓</a:t>
+            </a:r>
+          </a:p>
+        </p:txBody>
+      </p:sp>
+      <p:sp xmlns:a="http://schemas.openxmlformats.org/drawingml/2006/main">
+        <p:nvSpPr>
+          <p:cNvPr id="38" name="TextBox 37"/>
+          <p:cNvSpPr txBox="1"/>
+          <p:nvPr/>
+        </p:nvSpPr>
+        <p:spPr>
+          <a:xfrm>
+            <a:off x="1133856" y="3136392"/>
+            <a:ext cx="3931920" cy="310896"/>
+          </a:xfrm>
+          <a:prstGeom prst="rect">
+            <a:avLst/>
+          </a:prstGeom>
+          <a:noFill/>
+        </p:spPr>
+        <p:txBody>
+          <a:bodyPr wrap="square" lIns="0" rIns="0" tIns="0" bIns="0">
+            <a:spAutoFit/>
+          </a:bodyPr>
+          <a:lstStyle/>
+          <a:p>
+            <a:pPr algn="l"/>
+            <a:r>
+              <a:rPr sz="1350" b="1">
+                <a:solidFill>
+                  <a:srgbClr val="172033"/>
+                </a:solidFill>
+                <a:latin typeface="Arial"/>
+              </a:rPr>
+              <a:t>인증·소유권·세션 공격 검증</a:t>
+            </a:r>
+          </a:p>
+        </p:txBody>
+      </p:sp>
+      <p:sp xmlns:a="http://schemas.openxmlformats.org/drawingml/2006/main">
+        <p:nvSpPr>
+          <p:cNvPr id="39" name="TextBox 38"/>
+          <p:cNvSpPr txBox="1"/>
+          <p:nvPr/>
+        </p:nvSpPr>
+        <p:spPr>
+          <a:xfrm>
+            <a:off x="5212080" y="3154680"/>
+            <a:ext cx="6035040" cy="310896"/>
+          </a:xfrm>
+          <a:prstGeom prst="rect">
+            <a:avLst/>
+          </a:prstGeom>
+          <a:noFill/>
+        </p:spPr>
+        <p:txBody>
+          <a:bodyPr wrap="square" lIns="0" rIns="0" tIns="0" bIns="0">
+            <a:spAutoFit/>
+          </a:bodyPr>
+          <a:lstStyle/>
+          <a:p>
+            <a:pPr algn="l"/>
+            <a:r>
+              <a:rPr sz="1150" b="0">
+                <a:solidFill>
+                  <a:srgbClr val="667085"/>
+                </a:solidFill>
+                <a:latin typeface="Arial"/>
+              </a:rPr>
+              <a:t>성공과 거절을 같은 표에 · 증거 01–11</a:t>
+            </a:r>
+          </a:p>
+        </p:txBody>
+      </p:sp>
+      <p:sp xmlns:a="http://schemas.openxmlformats.org/drawingml/2006/main">
+        <p:nvSpPr>
+          <p:cNvPr id="40" name="TextBox 39"/>
+          <p:cNvSpPr txBox="1"/>
+          <p:nvPr/>
+        </p:nvSpPr>
+        <p:spPr>
+          <a:xfrm>
+            <a:off x="731520" y="3639312"/>
+            <a:ext cx="292608" cy="310896"/>
+          </a:xfrm>
+          <a:prstGeom prst="rect">
+            <a:avLst/>
+          </a:prstGeom>
+          <a:noFill/>
+        </p:spPr>
+        <p:txBody>
+          <a:bodyPr wrap="square" lIns="0" rIns="0" tIns="0" bIns="0">
+            <a:spAutoFit/>
+          </a:bodyPr>
+          <a:lstStyle/>
+          <a:p>
+            <a:pPr algn="l"/>
+            <a:r>
+              <a:rPr sz="1500" b="1">
+                <a:solidFill>
+                  <a:srgbClr val="15803D"/>
+                </a:solidFill>
+                <a:latin typeface="Arial"/>
+              </a:rPr>
+              <a:t>✓</a:t>
+            </a:r>
+          </a:p>
+        </p:txBody>
+      </p:sp>
+      <p:sp xmlns:a="http://schemas.openxmlformats.org/drawingml/2006/main">
+        <p:nvSpPr>
+          <p:cNvPr id="41" name="TextBox 40"/>
+          <p:cNvSpPr txBox="1"/>
+          <p:nvPr/>
+        </p:nvSpPr>
+        <p:spPr>
+          <a:xfrm>
+            <a:off x="1133856" y="3639312"/>
+            <a:ext cx="3931920" cy="310896"/>
+          </a:xfrm>
+          <a:prstGeom prst="rect">
+            <a:avLst/>
+          </a:prstGeom>
+          <a:noFill/>
+        </p:spPr>
+        <p:txBody>
+          <a:bodyPr wrap="square" lIns="0" rIns="0" tIns="0" bIns="0">
+            <a:spAutoFit/>
+          </a:bodyPr>
+          <a:lstStyle/>
+          <a:p>
+            <a:pPr algn="l"/>
+            <a:r>
+              <a:rPr sz="1350" b="1">
+                <a:solidFill>
+                  <a:srgbClr val="172033"/>
+                </a:solidFill>
+                <a:latin typeface="Arial"/>
+              </a:rPr>
+              <a:t>자동 검사와 비밀값 감사</a:t>
+            </a:r>
+          </a:p>
+        </p:txBody>
+      </p:sp>
+      <p:sp xmlns:a="http://schemas.openxmlformats.org/drawingml/2006/main">
+        <p:nvSpPr>
+          <p:cNvPr id="42" name="TextBox 41"/>
+          <p:cNvSpPr txBox="1"/>
+          <p:nvPr/>
+        </p:nvSpPr>
+        <p:spPr>
+          <a:xfrm>
+            <a:off x="5212080" y="3657600"/>
+            <a:ext cx="6035040" cy="310896"/>
+          </a:xfrm>
+          <a:prstGeom prst="rect">
+            <a:avLst/>
+          </a:prstGeom>
+          <a:noFill/>
+        </p:spPr>
+        <p:txBody>
+          <a:bodyPr wrap="square" lIns="0" rIns="0" tIns="0" bIns="0">
+            <a:spAutoFit/>
+          </a:bodyPr>
+          <a:lstStyle/>
+          <a:p>
+            <a:pPr algn="l"/>
+            <a:r>
+              <a:rPr sz="1150" b="0">
+                <a:solidFill>
+                  <a:srgbClr val="667085"/>
+                </a:solidFill>
+                <a:latin typeface="Arial"/>
+              </a:rPr>
+              <a:t>backend 319 · frontend 76 · 감사 0건</a:t>
+            </a:r>
+          </a:p>
+        </p:txBody>
+      </p:sp>
+      <p:sp xmlns:a="http://schemas.openxmlformats.org/drawingml/2006/main">
+        <p:nvSpPr>
+          <p:cNvPr id="43" name="TextBox 42"/>
+          <p:cNvSpPr txBox="1"/>
+          <p:nvPr/>
+        </p:nvSpPr>
+        <p:spPr>
+          <a:xfrm>
+            <a:off x="731520" y="4142232"/>
+            <a:ext cx="292608" cy="310896"/>
+          </a:xfrm>
+          <a:prstGeom prst="rect">
+            <a:avLst/>
+          </a:prstGeom>
+          <a:noFill/>
+        </p:spPr>
+        <p:txBody>
+          <a:bodyPr wrap="square" lIns="0" rIns="0" tIns="0" bIns="0">
+            <a:spAutoFit/>
+          </a:bodyPr>
+          <a:lstStyle/>
+          <a:p>
+            <a:pPr algn="l"/>
+            <a:r>
+              <a:rPr sz="1500" b="1">
+                <a:solidFill>
+                  <a:srgbClr val="15803D"/>
+                </a:solidFill>
+                <a:latin typeface="Arial"/>
+              </a:rPr>
+              <a:t>✓</a:t>
+            </a:r>
+          </a:p>
+        </p:txBody>
+      </p:sp>
+      <p:sp xmlns:a="http://schemas.openxmlformats.org/drawingml/2006/main">
+        <p:nvSpPr>
+          <p:cNvPr id="44" name="TextBox 43"/>
+          <p:cNvSpPr txBox="1"/>
+          <p:nvPr/>
+        </p:nvSpPr>
+        <p:spPr>
+          <a:xfrm>
+            <a:off x="1133856" y="4142232"/>
+            <a:ext cx="3931920" cy="310896"/>
+          </a:xfrm>
+          <a:prstGeom prst="rect">
+            <a:avLst/>
+          </a:prstGeom>
+          <a:noFill/>
+        </p:spPr>
+        <p:txBody>
+          <a:bodyPr wrap="square" lIns="0" rIns="0" tIns="0" bIns="0">
+            <a:spAutoFit/>
+          </a:bodyPr>
+          <a:lstStyle/>
+          <a:p>
+            <a:pPr algn="l"/>
+            <a:r>
+              <a:rPr sz="1350" b="1">
+                <a:solidFill>
+                  <a:srgbClr val="172033"/>
+                </a:solidFill>
+                <a:latin typeface="Arial"/>
+              </a:rPr>
+              <a:t>최종 배포와 배포본 확인</a:t>
+            </a:r>
+          </a:p>
+        </p:txBody>
+      </p:sp>
+      <p:sp xmlns:a="http://schemas.openxmlformats.org/drawingml/2006/main">
+        <p:nvSpPr>
+          <p:cNvPr id="45" name="TextBox 44"/>
+          <p:cNvSpPr txBox="1"/>
+          <p:nvPr/>
+        </p:nvSpPr>
+        <p:spPr>
+          <a:xfrm>
+            <a:off x="5212080" y="4160520"/>
+            <a:ext cx="6035040" cy="310896"/>
+          </a:xfrm>
+          <a:prstGeom prst="rect">
+            <a:avLst/>
+          </a:prstGeom>
+          <a:noFill/>
+        </p:spPr>
+        <p:txBody>
+          <a:bodyPr wrap="square" lIns="0" rIns="0" tIns="0" bIns="0">
+            <a:spAutoFit/>
+          </a:bodyPr>
+          <a:lstStyle/>
+          <a:p>
+            <a:pPr algn="l"/>
+            <a:r>
+              <a:rPr sz="1150" b="0">
+                <a:solidFill>
+                  <a:srgbClr val="667085"/>
+                </a:solidFill>
+                <a:latin typeface="Arial"/>
+              </a:rPr>
+              <a:t>acfaa67 · 번들 해시가 로컬 빌드와 일치</a:t>
+            </a:r>
+          </a:p>
+        </p:txBody>
+      </p:sp>
+      <p:sp xmlns:a="http://schemas.openxmlformats.org/drawingml/2006/main">
+        <p:nvSpPr>
+          <p:cNvPr id="46" name="TextBox 45"/>
+          <p:cNvSpPr txBox="1"/>
+          <p:nvPr/>
+        </p:nvSpPr>
+        <p:spPr>
+          <a:xfrm>
+            <a:off x="731520" y="4645152"/>
+            <a:ext cx="292608" cy="310896"/>
+          </a:xfrm>
+          <a:prstGeom prst="rect">
+            <a:avLst/>
+          </a:prstGeom>
+          <a:noFill/>
+        </p:spPr>
+        <p:txBody>
+          <a:bodyPr wrap="square" lIns="0" rIns="0" tIns="0" bIns="0">
+            <a:spAutoFit/>
+          </a:bodyPr>
+          <a:lstStyle/>
+          <a:p>
+            <a:pPr algn="l"/>
+            <a:r>
+              <a:rPr sz="1500" b="1">
+                <a:solidFill>
+                  <a:srgbClr val="15803D"/>
+                </a:solidFill>
+                <a:latin typeface="Arial"/>
+              </a:rPr>
+              <a:t>✓</a:t>
+            </a:r>
+          </a:p>
+        </p:txBody>
+      </p:sp>
+      <p:sp xmlns:a="http://schemas.openxmlformats.org/drawingml/2006/main">
+        <p:nvSpPr>
+          <p:cNvPr id="47" name="TextBox 46"/>
+          <p:cNvSpPr txBox="1"/>
+          <p:nvPr/>
+        </p:nvSpPr>
+        <p:spPr>
+          <a:xfrm>
+            <a:off x="1133856" y="4645152"/>
+            <a:ext cx="3931920" cy="310896"/>
+          </a:xfrm>
+          <a:prstGeom prst="rect">
+            <a:avLst/>
+          </a:prstGeom>
+          <a:noFill/>
+        </p:spPr>
+        <p:txBody>
+          <a:bodyPr wrap="square" lIns="0" rIns="0" tIns="0" bIns="0">
+            <a:spAutoFit/>
+          </a:bodyPr>
+          <a:lstStyle/>
+          <a:p>
+            <a:pPr algn="l"/>
+            <a:r>
+              <a:rPr sz="1350" b="1">
+                <a:solidFill>
+                  <a:srgbClr val="172033"/>
+                </a:solidFill>
+                <a:latin typeface="Arial"/>
+              </a:rPr>
+              <a:t>익명 접근 경계</a:t>
+            </a:r>
+          </a:p>
+        </p:txBody>
+      </p:sp>
+      <p:sp xmlns:a="http://schemas.openxmlformats.org/drawingml/2006/main">
+        <p:nvSpPr>
+          <p:cNvPr id="48" name="TextBox 47"/>
+          <p:cNvSpPr txBox="1"/>
+          <p:nvPr/>
+        </p:nvSpPr>
+        <p:spPr>
+          <a:xfrm>
+            <a:off x="5212080" y="4663440"/>
+            <a:ext cx="6035040" cy="310896"/>
+          </a:xfrm>
+          <a:prstGeom prst="rect">
+            <a:avLst/>
+          </a:prstGeom>
+          <a:noFill/>
+        </p:spPr>
+        <p:txBody>
+          <a:bodyPr wrap="square" lIns="0" rIns="0" tIns="0" bIns="0">
+            <a:spAutoFit/>
+          </a:bodyPr>
+          <a:lstStyle/>
+          <a:p>
+            <a:pPr algn="l"/>
+            <a:r>
+              <a:rPr sz="1150" b="0">
+                <a:solidFill>
+                  <a:srgbClr val="667085"/>
+                </a:solidFill>
+                <a:latin typeface="Arial"/>
+              </a:rPr>
+              <a:t>세션 없이 /settings → /login</a:t>
+            </a:r>
+          </a:p>
+        </p:txBody>
+      </p:sp>
+      <p:sp xmlns:a="http://schemas.openxmlformats.org/drawingml/2006/main">
+        <p:nvSpPr>
+          <p:cNvPr id="49" name="TextBox 48"/>
+          <p:cNvSpPr txBox="1"/>
+          <p:nvPr/>
+        </p:nvSpPr>
+        <p:spPr>
+          <a:xfrm>
+            <a:off x="731520" y="5148072"/>
+            <a:ext cx="292608" cy="310896"/>
+          </a:xfrm>
+          <a:prstGeom prst="rect">
+            <a:avLst/>
+          </a:prstGeom>
+          <a:noFill/>
+        </p:spPr>
+        <p:txBody>
+          <a:bodyPr wrap="square" lIns="0" rIns="0" tIns="0" bIns="0">
+            <a:spAutoFit/>
+          </a:bodyPr>
+          <a:lstStyle/>
+          <a:p>
+            <a:pPr algn="l"/>
+            <a:r>
+              <a:rPr sz="1500" b="1">
+                <a:solidFill>
+                  <a:srgbClr val="2563EB"/>
+                </a:solidFill>
+                <a:latin typeface="Arial"/>
+              </a:rPr>
+              <a:t>□</a:t>
+            </a:r>
+          </a:p>
+        </p:txBody>
+      </p:sp>
+      <p:sp xmlns:a="http://schemas.openxmlformats.org/drawingml/2006/main">
+        <p:nvSpPr>
+          <p:cNvPr id="50" name="TextBox 49"/>
+          <p:cNvSpPr txBox="1"/>
+          <p:nvPr/>
+        </p:nvSpPr>
+        <p:spPr>
+          <a:xfrm>
+            <a:off x="1133856" y="5148072"/>
+            <a:ext cx="3931920" cy="310896"/>
+          </a:xfrm>
+          <a:prstGeom prst="rect">
+            <a:avLst/>
+          </a:prstGeom>
+          <a:noFill/>
+        </p:spPr>
+        <p:txBody>
+          <a:bodyPr wrap="square" lIns="0" rIns="0" tIns="0" bIns="0">
+            <a:spAutoFit/>
+          </a:bodyPr>
+          <a:lstStyle/>
+          <a:p>
+            <a:pPr algn="l"/>
+            <a:r>
+              <a:rPr sz="1350" b="1">
+                <a:solidFill>
+                  <a:srgbClr val="172033"/>
+                </a:solidFill>
+                <a:latin typeface="Arial"/>
+              </a:rPr>
+              <a:t>공식 폼 제출</a:t>
+            </a:r>
+          </a:p>
+        </p:txBody>
+      </p:sp>
+      <p:sp xmlns:a="http://schemas.openxmlformats.org/drawingml/2006/main">
+        <p:nvSpPr>
+          <p:cNvPr id="51" name="TextBox 50"/>
+          <p:cNvSpPr txBox="1"/>
+          <p:nvPr/>
+        </p:nvSpPr>
+        <p:spPr>
+          <a:xfrm>
+            <a:off x="5212080" y="5166360"/>
+            <a:ext cx="6035040" cy="310896"/>
+          </a:xfrm>
+          <a:prstGeom prst="rect">
+            <a:avLst/>
+          </a:prstGeom>
+          <a:noFill/>
+        </p:spPr>
+        <p:txBody>
+          <a:bodyPr wrap="square" lIns="0" rIns="0" tIns="0" bIns="0">
+            <a:spAutoFit/>
+          </a:bodyPr>
+          <a:lstStyle/>
+          <a:p>
+            <a:pPr algn="l"/>
+            <a:r>
+              <a:rPr sz="1150" b="0">
+                <a:solidFill>
+                  <a:srgbClr val="667085"/>
+                </a:solidFill>
+                <a:latin typeface="Arial"/>
+              </a:rPr>
+              <a:t>제출문과 40자 commit URL 붙여넣기 — 남음</a:t>
+            </a:r>
+          </a:p>
+        </p:txBody>
+      </p:sp>
+      <p:sp xmlns:a="http://schemas.openxmlformats.org/drawingml/2006/main">
+        <p:nvSpPr>
+          <p:cNvPr id="52" name="Rounded Rectangle 51"/>
+          <p:cNvSpPr/>
+          <p:nvPr/>
+        </p:nvSpPr>
+        <p:spPr>
+          <a:xfrm>
+            <a:off x="612648" y="5852160"/>
+            <a:ext cx="10972800" cy="475488"/>
+          </a:xfrm>
+          <a:prstGeom prst="roundRect">
+            <a:avLst>
+              <a:gd name="adj" fmla="val 14000"/>
+            </a:avLst>
+          </a:prstGeom>
+          <a:solidFill>
+            <a:srgbClr val="EFF6FF"/>
+          </a:solidFill>
+          <a:ln w="9525">
+            <a:solidFill>
+              <a:srgbClr val="BFDBFE"/>
+            </a:solidFill>
+          </a:ln>
+          <a:effectLst/>
+        </p:spPr>
+        <p:style>
+          <a:lnRef idx="1">
+            <a:schemeClr val="accent1"/>
+          </a:lnRef>
+          <a:fillRef idx="3">
+            <a:schemeClr val="accent1"/>
+          </a:fillRef>
+          <a:effectRef idx="2">
+            <a:schemeClr val="accent1"/>
+          </a:effectRef>
+          <a:fontRef idx="minor">
+            <a:schemeClr val="lt1"/>
+          </a:fontRef>
+        </p:style>
+        <p:txBody>
+          <a:bodyPr rtlCol="0" anchor="ctr"/>
+          <a:lstStyle/>
+          <a:p/>
+        </p:txBody>
+      </p:sp>
+      <p:sp xmlns:a="http://schemas.openxmlformats.org/drawingml/2006/main">
+        <p:nvSpPr>
+          <p:cNvPr id="53" name="TextBox 52"/>
+          <p:cNvSpPr txBox="1"/>
+          <p:nvPr/>
+        </p:nvSpPr>
+        <p:spPr>
+          <a:xfrm>
+            <a:off x="914400" y="5971032"/>
+            <a:ext cx="10332720" cy="274320"/>
+          </a:xfrm>
+          <a:prstGeom prst="rect">
+            <a:avLst/>
+          </a:prstGeom>
+          <a:noFill/>
+        </p:spPr>
+        <p:txBody>
+          <a:bodyPr wrap="square" lIns="0" rIns="0" tIns="0" bIns="0">
+            <a:spAutoFit/>
+          </a:bodyPr>
+          <a:lstStyle/>
+          <a:p>
+            <a:pPr algn="l"/>
+            <a:r>
+              <a:rPr sz="1150" b="1">
+                <a:solidFill>
+                  <a:srgbClr val="172033"/>
+                </a:solidFill>
+                <a:latin typeface="Arial"/>
+              </a:rPr>
+              <a:t>여덟 줄 중 일곱은 근거 파일이나 배포본에서 확인한 것이고, 마지막 한 줄만 아직 남았다.</a:t>
+            </a:r>
+          </a:p>
+        </p:txBody>
+      </p:sp>
+    </p:spTree>
+    <p:extLst>
+      <p:ext uri="{BB962C8B-B14F-4D97-AF65-F5344CB8AC3E}">
+        <p14:creationId xmlns:p14="http://schemas.microsoft.com/office/powerpoint/2010/main" val="1994935265"/>
+      </p:ext>
+    </p:extLst>
+  </p:cSld>
+</p:sld>
+</file>
+
+<file path=ppt/slides/slide13.xml><?xml version="1.0" encoding="utf-8"?>
 <p:sld xmlns:p="http://schemas.openxmlformats.org/presentationml/2006/main">
   <p:cSld>
     <p:bg>
